--- a/lectures/06/Pointer Arithmetic, Memory Interpretation.pptx
+++ b/lectures/06/Pointer Arithmetic, Memory Interpretation.pptx
@@ -639,7 +639,121 @@
           <a:bodyPr/>
           <a:lstStyle/>
           <a:p>
-            <a:endParaRPr lang="en-US"/>
+            <a:r>
+              <a:rPr lang="ru-RU" dirty="0"/>
+              <a:t>Индексирование в языке C на самом деле является синтаксическим сокращением.</a:t>
+            </a:r>
+          </a:p>
+          <a:p>
+            <a:r>
+              <a:rPr lang="ru-RU" dirty="0"/>
+              <a:t>Выражение </a:t>
+            </a:r>
+            <a:r>
+              <a:rPr lang="ru-RU" sz="1200" kern="1200" dirty="0">
+                <a:solidFill>
+                  <a:schemeClr val="tx1"/>
+                </a:solidFill>
+                <a:latin typeface="+mn-lt"/>
+                <a:ea typeface="+mn-ea"/>
+                <a:cs typeface="+mn-cs"/>
+              </a:rPr>
+              <a:t>p[i]</a:t>
+            </a:r>
+            <a:r>
+              <a:rPr lang="ru-RU" dirty="0"/>
+              <a:t> определяется как </a:t>
+            </a:r>
+            <a:r>
+              <a:rPr lang="ru-RU" sz="1200" kern="1200" dirty="0">
+                <a:solidFill>
+                  <a:schemeClr val="tx1"/>
+                </a:solidFill>
+                <a:latin typeface="+mn-lt"/>
+                <a:ea typeface="+mn-ea"/>
+                <a:cs typeface="+mn-cs"/>
+              </a:rPr>
+              <a:t>*(p + i)</a:t>
+            </a:r>
+            <a:r>
+              <a:rPr lang="ru-RU" dirty="0"/>
+              <a:t>. То есть сначала выполняется адресная арифметика, а затем разыменование указателя.</a:t>
+            </a:r>
+          </a:p>
+          <a:p>
+            <a:r>
+              <a:rPr lang="ru-RU" dirty="0"/>
+              <a:t>Поэтому индексирование работает не только для массивов, но и для любых указателей.</a:t>
+            </a:r>
+          </a:p>
+          <a:p>
+            <a:r>
+              <a:rPr lang="ru-RU" dirty="0"/>
+              <a:t>Из этого определения следует необычное свойство: выражения </a:t>
+            </a:r>
+            <a:r>
+              <a:rPr lang="ru-RU" sz="1200" kern="1200" dirty="0">
+                <a:solidFill>
+                  <a:schemeClr val="tx1"/>
+                </a:solidFill>
+                <a:latin typeface="+mn-lt"/>
+                <a:ea typeface="+mn-ea"/>
+                <a:cs typeface="+mn-cs"/>
+              </a:rPr>
+              <a:t>p[i]</a:t>
+            </a:r>
+            <a:r>
+              <a:rPr lang="ru-RU" dirty="0"/>
+              <a:t> и </a:t>
+            </a:r>
+            <a:r>
+              <a:rPr lang="ru-RU" sz="1200" kern="1200" dirty="0">
+                <a:solidFill>
+                  <a:schemeClr val="tx1"/>
+                </a:solidFill>
+                <a:latin typeface="+mn-lt"/>
+                <a:ea typeface="+mn-ea"/>
+                <a:cs typeface="+mn-cs"/>
+              </a:rPr>
+              <a:t>i[p]</a:t>
+            </a:r>
+            <a:r>
+              <a:rPr lang="ru-RU" dirty="0"/>
+              <a:t> эквивалентны, поскольку оба означают </a:t>
+            </a:r>
+            <a:r>
+              <a:rPr lang="ru-RU" sz="1200" kern="1200" dirty="0">
+                <a:solidFill>
+                  <a:schemeClr val="tx1"/>
+                </a:solidFill>
+                <a:latin typeface="+mn-lt"/>
+                <a:ea typeface="+mn-ea"/>
+                <a:cs typeface="+mn-cs"/>
+              </a:rPr>
+              <a:t>*(p + i)</a:t>
+            </a:r>
+            <a:r>
+              <a:rPr lang="ru-RU" dirty="0"/>
+              <a:t>. Обычно используется запись </a:t>
+            </a:r>
+            <a:r>
+              <a:rPr lang="ru-RU" sz="1200" kern="1200" dirty="0">
+                <a:solidFill>
+                  <a:schemeClr val="tx1"/>
+                </a:solidFill>
+                <a:latin typeface="+mn-lt"/>
+                <a:ea typeface="+mn-ea"/>
+                <a:cs typeface="+mn-cs"/>
+              </a:rPr>
+              <a:t>p[i]</a:t>
+            </a:r>
+            <a:r>
+              <a:rPr lang="ru-RU" dirty="0"/>
+              <a:t>, но с точки зрения языка обе формы равноправны.</a:t>
+            </a:r>
+          </a:p>
+          <a:p>
+            <a:endParaRPr lang="en-US" dirty="0"/>
           </a:p>
         </p:txBody>
       </p:sp>
@@ -1251,12 +1365,15 @@
           <a:lstStyle/>
           <a:p>
             <a:r>
-              <a:rPr lang="ru-RU" b="1" dirty="0"/>
-              <a:t>Возможное представление</a:t>
-            </a:r>
-          </a:p>
-          <a:p>
-            <a:pPr rtl="0"/>
+              <a:rPr lang="ru-RU" dirty="0"/>
+              <a:t>Иногда программе нужно хранить очень небольшие значения — например флаги или коды состояний. Для таких данных достаточно нескольких бит.</a:t>
+            </a:r>
+          </a:p>
+          <a:p>
+            <a:r>
+              <a:rPr lang="ru-RU" dirty="0"/>
+              <a:t>Однако минимальная адресуемая единица памяти — это байт. Поэтому если мы объявим несколько переменных типа </a:t>
+            </a:r>
             <a:r>
               <a:rPr lang="ru-RU" sz="1200" kern="1200" dirty="0" err="1">
                 <a:solidFill>
@@ -1266,10 +1383,14 @@
                 <a:ea typeface="+mn-ea"/>
                 <a:cs typeface="+mn-cs"/>
               </a:rPr>
-              <a:t>ready</a:t>
-            </a:r>
-            <a:r>
-              <a:rPr lang="ru-RU" sz="1200" kern="1200" dirty="0">
+              <a:t>char</a:t>
+            </a:r>
+            <a:r>
+              <a:rPr lang="ru-RU" dirty="0"/>
+              <a:t> или </a:t>
+            </a:r>
+            <a:r>
+              <a:rPr lang="ru-RU" sz="1200" kern="1200" dirty="0" err="1">
                 <a:solidFill>
                   <a:schemeClr val="tx1"/>
                 </a:solidFill>
@@ -1277,168 +1398,32 @@
                 <a:ea typeface="+mn-ea"/>
                 <a:cs typeface="+mn-cs"/>
               </a:rPr>
-              <a:t> | </a:t>
-            </a:r>
-            <a:r>
-              <a:rPr lang="ru-RU" sz="1200" kern="1200" dirty="0" err="1">
-                <a:solidFill>
-                  <a:schemeClr val="tx1"/>
-                </a:solidFill>
-                <a:latin typeface="+mn-lt"/>
-                <a:ea typeface="+mn-ea"/>
-                <a:cs typeface="+mn-cs"/>
-              </a:rPr>
-              <a:t>error</a:t>
-            </a:r>
-            <a:r>
-              <a:rPr lang="ru-RU" sz="1200" kern="1200" dirty="0">
-                <a:solidFill>
-                  <a:schemeClr val="tx1"/>
-                </a:solidFill>
-                <a:latin typeface="+mn-lt"/>
-                <a:ea typeface="+mn-ea"/>
-                <a:cs typeface="+mn-cs"/>
-              </a:rPr>
-              <a:t> | </a:t>
-            </a:r>
-            <a:r>
-              <a:rPr lang="ru-RU" sz="1200" kern="1200" dirty="0" err="1">
-                <a:solidFill>
-                  <a:schemeClr val="tx1"/>
-                </a:solidFill>
-                <a:latin typeface="+mn-lt"/>
-                <a:ea typeface="+mn-ea"/>
-                <a:cs typeface="+mn-cs"/>
-              </a:rPr>
-              <a:t>mode</a:t>
-            </a:r>
-            <a:r>
-              <a:rPr lang="ru-RU" sz="1200" kern="1200" dirty="0">
-                <a:solidFill>
-                  <a:schemeClr val="tx1"/>
-                </a:solidFill>
-                <a:latin typeface="+mn-lt"/>
-                <a:ea typeface="+mn-ea"/>
-                <a:cs typeface="+mn-cs"/>
-              </a:rPr>
-              <a:t> | </a:t>
-            </a:r>
-            <a:r>
-              <a:rPr lang="ru-RU" sz="1200" kern="1200" dirty="0" err="1">
-                <a:solidFill>
-                  <a:schemeClr val="tx1"/>
-                </a:solidFill>
-                <a:latin typeface="+mn-lt"/>
-                <a:ea typeface="+mn-ea"/>
-                <a:cs typeface="+mn-cs"/>
-              </a:rPr>
-              <a:t>state</a:t>
-            </a:r>
-            <a:br>
-              <a:rPr lang="ru-RU" sz="1200" kern="1200" dirty="0">
-                <a:solidFill>
-                  <a:schemeClr val="tx1"/>
-                </a:solidFill>
-                <a:latin typeface="+mn-lt"/>
-                <a:ea typeface="+mn-ea"/>
-                <a:cs typeface="+mn-cs"/>
-              </a:rPr>
-            </a:br>
-            <a:r>
-              <a:rPr lang="ru-RU" sz="1200" kern="1200" dirty="0">
-                <a:solidFill>
-                  <a:schemeClr val="tx1"/>
-                </a:solidFill>
-                <a:latin typeface="+mn-lt"/>
-                <a:ea typeface="+mn-ea"/>
-                <a:cs typeface="+mn-cs"/>
-              </a:rPr>
-              <a:t>  1       1      2       3</a:t>
-            </a:r>
-          </a:p>
-          <a:p>
-            <a:r>
-              <a:rPr lang="ru-RU" dirty="0"/>
-              <a:t>Всего требуется:</a:t>
-            </a:r>
-          </a:p>
-          <a:p>
-            <a:pPr rtl="0"/>
-            <a:r>
-              <a:rPr lang="ru-RU" sz="1200" kern="1200" dirty="0">
-                <a:solidFill>
-                  <a:schemeClr val="tx1"/>
-                </a:solidFill>
-                <a:latin typeface="+mn-lt"/>
-                <a:ea typeface="+mn-ea"/>
-                <a:cs typeface="+mn-cs"/>
-              </a:rPr>
-              <a:t>7 бит</a:t>
-            </a:r>
-          </a:p>
-          <a:p>
-            <a:r>
-              <a:rPr lang="ru-RU" dirty="0"/>
-              <a:t>Но обычные переменные займут:</a:t>
-            </a:r>
-          </a:p>
-          <a:p>
-            <a:pPr rtl="0"/>
-            <a:r>
-              <a:rPr lang="ru-RU" sz="1200" kern="1200" dirty="0">
-                <a:solidFill>
-                  <a:schemeClr val="tx1"/>
-                </a:solidFill>
-                <a:latin typeface="+mn-lt"/>
-                <a:ea typeface="+mn-ea"/>
-                <a:cs typeface="+mn-cs"/>
-              </a:rPr>
-              <a:t>4 × 1 </a:t>
-            </a:r>
-            <a:r>
-              <a:rPr lang="ru-RU" sz="1200" kern="1200" dirty="0" err="1">
-                <a:solidFill>
-                  <a:schemeClr val="tx1"/>
-                </a:solidFill>
-                <a:latin typeface="+mn-lt"/>
-                <a:ea typeface="+mn-ea"/>
-                <a:cs typeface="+mn-cs"/>
-              </a:rPr>
-              <a:t>byte</a:t>
-            </a:r>
-            <a:r>
-              <a:rPr lang="ru-RU" sz="1200" kern="1200" dirty="0">
-                <a:solidFill>
-                  <a:schemeClr val="tx1"/>
-                </a:solidFill>
-                <a:latin typeface="+mn-lt"/>
-                <a:ea typeface="+mn-ea"/>
-                <a:cs typeface="+mn-cs"/>
-              </a:rPr>
-              <a:t> = 4 </a:t>
-            </a:r>
-            <a:r>
-              <a:rPr lang="ru-RU" sz="1200" kern="1200" dirty="0" err="1">
-                <a:solidFill>
-                  <a:schemeClr val="tx1"/>
-                </a:solidFill>
-                <a:latin typeface="+mn-lt"/>
-                <a:ea typeface="+mn-ea"/>
-                <a:cs typeface="+mn-cs"/>
-              </a:rPr>
-              <a:t>bytes</a:t>
-            </a:r>
-            <a:endParaRPr lang="ru-RU" sz="1200" kern="1200" dirty="0">
-              <a:solidFill>
-                <a:schemeClr val="tx1"/>
-              </a:solidFill>
-              <a:latin typeface="+mn-lt"/>
-              <a:ea typeface="+mn-ea"/>
-              <a:cs typeface="+mn-cs"/>
-            </a:endParaRPr>
-          </a:p>
-          <a:p>
-            <a:endParaRPr lang="en-US" dirty="0"/>
+              <a:t>bool</a:t>
+            </a:r>
+            <a:r>
+              <a:rPr lang="ru-RU" dirty="0"/>
+              <a:t>, каждая из них будет занимать как минимум один байт.</a:t>
+            </a:r>
+          </a:p>
+          <a:p>
+            <a:r>
+              <a:rPr lang="ru-RU" dirty="0"/>
+              <a:t>В результате данные, которые логически занимают несколько бит, могут занимать несколько байтов.</a:t>
+            </a:r>
+          </a:p>
+          <a:p>
+            <a:r>
+              <a:rPr lang="ru-RU" dirty="0"/>
+              <a:t>Чтобы компактно хранить такие значения, часто используют упаковку нескольких полей в один машинный объект. В языке C для этого существует механизм </a:t>
+            </a:r>
+            <a:r>
+              <a:rPr lang="ru-RU" b="1" dirty="0"/>
+              <a:t>битовых полей</a:t>
+            </a:r>
+            <a:r>
+              <a:rPr lang="ru-RU" dirty="0"/>
+              <a:t>.</a:t>
+            </a:r>
           </a:p>
         </p:txBody>
       </p:sp>
@@ -4881,7 +4866,107 @@
           <a:bodyPr/>
           <a:lstStyle/>
           <a:p>
-            <a:endParaRPr lang="en-US"/>
+            <a:r>
+              <a:rPr lang="ru-RU" dirty="0"/>
+              <a:t>Когда используется </a:t>
+            </a:r>
+            <a:r>
+              <a:rPr lang="ru-RU" sz="1200" kern="1200" dirty="0" err="1">
+                <a:solidFill>
+                  <a:schemeClr val="tx1"/>
+                </a:solidFill>
+                <a:latin typeface="+mn-lt"/>
+                <a:ea typeface="+mn-ea"/>
+                <a:cs typeface="+mn-cs"/>
+              </a:rPr>
+              <a:t>union</a:t>
+            </a:r>
+            <a:r>
+              <a:rPr lang="ru-RU" dirty="0"/>
+              <a:t>, все поля объединения занимают одну и ту же область памяти. Поэтому в каждый момент времени корректно читать только то поле, которое было записано последним.</a:t>
+            </a:r>
+          </a:p>
+          <a:p>
+            <a:r>
+              <a:rPr lang="ru-RU" dirty="0"/>
+              <a:t>Чтобы программа понимала, какое значение сейчас хранится в </a:t>
+            </a:r>
+            <a:r>
+              <a:rPr lang="ru-RU" sz="1200" kern="1200" dirty="0" err="1">
+                <a:solidFill>
+                  <a:schemeClr val="tx1"/>
+                </a:solidFill>
+                <a:latin typeface="+mn-lt"/>
+                <a:ea typeface="+mn-ea"/>
+                <a:cs typeface="+mn-cs"/>
+              </a:rPr>
+              <a:t>union</a:t>
+            </a:r>
+            <a:r>
+              <a:rPr lang="ru-RU" dirty="0"/>
+              <a:t>, рядом обычно хранится дополнительная информация — тип этого значения. Такой признак называют тегом.</a:t>
+            </a:r>
+          </a:p>
+          <a:p>
+            <a:r>
+              <a:rPr lang="ru-RU" dirty="0"/>
+              <a:t>Чаще всего тег реализуют с помощью перечисления </a:t>
+            </a:r>
+            <a:r>
+              <a:rPr lang="ru-RU" sz="1200" kern="1200" dirty="0" err="1">
+                <a:solidFill>
+                  <a:schemeClr val="tx1"/>
+                </a:solidFill>
+                <a:latin typeface="+mn-lt"/>
+                <a:ea typeface="+mn-ea"/>
+                <a:cs typeface="+mn-cs"/>
+              </a:rPr>
+              <a:t>enum</a:t>
+            </a:r>
+            <a:r>
+              <a:rPr lang="ru-RU" dirty="0"/>
+              <a:t>, которое хранит текущий тип значения. Затем структура содержит это поле и сам </a:t>
+            </a:r>
+            <a:r>
+              <a:rPr lang="ru-RU" sz="1200" kern="1200" dirty="0" err="1">
+                <a:solidFill>
+                  <a:schemeClr val="tx1"/>
+                </a:solidFill>
+                <a:latin typeface="+mn-lt"/>
+                <a:ea typeface="+mn-ea"/>
+                <a:cs typeface="+mn-cs"/>
+              </a:rPr>
+              <a:t>union</a:t>
+            </a:r>
+            <a:r>
+              <a:rPr lang="ru-RU" dirty="0"/>
+              <a:t>.</a:t>
+            </a:r>
+          </a:p>
+          <a:p>
+            <a:r>
+              <a:rPr lang="ru-RU" dirty="0"/>
+              <a:t>Такой шаблон называется </a:t>
+            </a:r>
+            <a:r>
+              <a:rPr lang="ru-RU" i="1" dirty="0" err="1"/>
+              <a:t>tagged</a:t>
+            </a:r>
+            <a:r>
+              <a:rPr lang="ru-RU" i="1" dirty="0"/>
+              <a:t> </a:t>
+            </a:r>
+            <a:r>
+              <a:rPr lang="ru-RU" i="1" dirty="0" err="1"/>
+              <a:t>union</a:t>
+            </a:r>
+            <a:r>
+              <a:rPr lang="ru-RU" dirty="0"/>
+              <a:t>. Он позволяет безопасно хранить значения разных типов в одной структуре и широко используется в системном программировании.</a:t>
+            </a:r>
+          </a:p>
+          <a:p>
+            <a:endParaRPr lang="en-US" dirty="0"/>
           </a:p>
         </p:txBody>
       </p:sp>
@@ -6072,6 +6157,151 @@
 </p:notes>
 </file>
 
+<file path=ppt/notesSlides/notesSlide37.xml><?xml version="1.0" encoding="utf-8"?>
+<p:notes xmlns:a="http://schemas.openxmlformats.org/drawingml/2006/main" xmlns:r="http://schemas.openxmlformats.org/officeDocument/2006/relationships" xmlns:p="http://schemas.openxmlformats.org/presentationml/2006/main">
+  <p:cSld>
+    <p:spTree>
+      <p:nvGrpSpPr>
+        <p:cNvPr id="1" name=""/>
+        <p:cNvGrpSpPr/>
+        <p:nvPr/>
+      </p:nvGrpSpPr>
+      <p:grpSpPr>
+        <a:xfrm>
+          <a:off x="0" y="0"/>
+          <a:ext cx="0" cy="0"/>
+          <a:chOff x="0" y="0"/>
+          <a:chExt cx="0" cy="0"/>
+        </a:xfrm>
+      </p:grpSpPr>
+      <p:sp>
+        <p:nvSpPr>
+          <p:cNvPr id="2" name="Slide Image Placeholder 1"/>
+          <p:cNvSpPr>
+            <a:spLocks noGrp="1" noRot="1" noChangeAspect="1"/>
+          </p:cNvSpPr>
+          <p:nvPr>
+            <p:ph type="sldImg"/>
+          </p:nvPr>
+        </p:nvSpPr>
+        <p:spPr/>
+      </p:sp>
+      <p:sp>
+        <p:nvSpPr>
+          <p:cNvPr id="3" name="Notes Placeholder 2"/>
+          <p:cNvSpPr>
+            <a:spLocks noGrp="1"/>
+          </p:cNvSpPr>
+          <p:nvPr>
+            <p:ph type="body" idx="1"/>
+          </p:nvPr>
+        </p:nvSpPr>
+        <p:spPr/>
+        <p:txBody>
+          <a:bodyPr/>
+          <a:lstStyle/>
+          <a:p>
+            <a:r>
+              <a:rPr lang="ru-RU" dirty="0"/>
+              <a:t>Сегодня мы рассмотрели три тесно связанные темы.</a:t>
+            </a:r>
+          </a:p>
+          <a:p>
+            <a:r>
+              <a:rPr lang="ru-RU" dirty="0"/>
+              <a:t>Во-первых, адресную арифметику. Указатель хранит адрес, но арифметика указателей работает не в байтах, а в элементах соответствующего типа. При этом такие операции корректны только в пределах одного массива.</a:t>
+            </a:r>
+          </a:p>
+          <a:p>
+            <a:r>
+              <a:rPr lang="ru-RU" dirty="0"/>
+              <a:t>Во-вторых, битовые поля. Они позволяют компактно упаковывать небольшие значения и флаги, но их представление в памяти зависит от компилятора и архитектуры.</a:t>
+            </a:r>
+          </a:p>
+          <a:p>
+            <a:r>
+              <a:rPr lang="ru-RU" dirty="0"/>
+              <a:t>В-третьих, объединения </a:t>
+            </a:r>
+            <a:r>
+              <a:rPr lang="ru-RU" sz="1200" kern="1200" dirty="0" err="1">
+                <a:solidFill>
+                  <a:schemeClr val="tx1"/>
+                </a:solidFill>
+                <a:latin typeface="+mn-lt"/>
+                <a:ea typeface="+mn-ea"/>
+                <a:cs typeface="+mn-cs"/>
+              </a:rPr>
+              <a:t>union</a:t>
+            </a:r>
+            <a:r>
+              <a:rPr lang="ru-RU" dirty="0"/>
+              <a:t>. Они позволяют задать несколько представлений одной и той же области памяти. Это полезный инструмент, но использовать его нужно аккуратно. На практике часто применяют </a:t>
+            </a:r>
+            <a:r>
+              <a:rPr lang="ru-RU" dirty="0" err="1"/>
+              <a:t>tagged</a:t>
+            </a:r>
+            <a:r>
+              <a:rPr lang="ru-RU" dirty="0"/>
+              <a:t> </a:t>
+            </a:r>
+            <a:r>
+              <a:rPr lang="ru-RU" dirty="0" err="1"/>
+              <a:t>union</a:t>
+            </a:r>
+            <a:r>
+              <a:rPr lang="ru-RU" dirty="0"/>
+              <a:t>, когда рядом с объединением явно хранится тип текущего значения.</a:t>
+            </a:r>
+          </a:p>
+          <a:p>
+            <a:r>
+              <a:rPr lang="ru-RU" dirty="0"/>
+              <a:t>Главная идея всей лекции состоит в том, что память сама по себе хранит только байты. А язык C даёт программисту средства управлять тем, как эти байты интерпретируются.</a:t>
+            </a:r>
+          </a:p>
+          <a:p>
+            <a:endParaRPr lang="en-US" dirty="0"/>
+          </a:p>
+        </p:txBody>
+      </p:sp>
+      <p:sp>
+        <p:nvSpPr>
+          <p:cNvPr id="4" name="Slide Number Placeholder 3"/>
+          <p:cNvSpPr>
+            <a:spLocks noGrp="1"/>
+          </p:cNvSpPr>
+          <p:nvPr>
+            <p:ph type="sldNum" sz="quarter" idx="5"/>
+          </p:nvPr>
+        </p:nvSpPr>
+        <p:spPr/>
+        <p:txBody>
+          <a:bodyPr/>
+          <a:lstStyle/>
+          <a:p>
+            <a:fld id="{4D96EF2B-C127-47DA-B29D-C80843EB954C}" type="slidenum">
+              <a:rPr lang="en-US" smtClean="0"/>
+              <a:t>37</a:t>
+            </a:fld>
+            <a:endParaRPr lang="en-US"/>
+          </a:p>
+        </p:txBody>
+      </p:sp>
+    </p:spTree>
+    <p:extLst>
+      <p:ext uri="{BB962C8B-B14F-4D97-AF65-F5344CB8AC3E}">
+        <p14:creationId xmlns:p14="http://schemas.microsoft.com/office/powerpoint/2010/main" val="3704904120"/>
+      </p:ext>
+    </p:extLst>
+  </p:cSld>
+  <p:clrMapOvr>
+    <a:masterClrMapping/>
+  </p:clrMapOvr>
+</p:notes>
+</file>
+
 <file path=ppt/notesSlides/notesSlide4.xml><?xml version="1.0" encoding="utf-8"?>
 <p:notes xmlns:a="http://schemas.openxmlformats.org/drawingml/2006/main" xmlns:r="http://schemas.openxmlformats.org/officeDocument/2006/relationships" xmlns:p="http://schemas.openxmlformats.org/presentationml/2006/main">
   <p:cSld>
@@ -6701,7 +6931,203 @@
           <a:bodyPr/>
           <a:lstStyle/>
           <a:p>
-            <a:endParaRPr lang="en-US"/>
+            <a:r>
+              <a:rPr lang="ru-RU" dirty="0"/>
+              <a:t>Если указатель имеет тип </a:t>
+            </a:r>
+            <a:r>
+              <a:rPr lang="ru-RU" sz="1200" kern="1200" dirty="0">
+                <a:solidFill>
+                  <a:schemeClr val="tx1"/>
+                </a:solidFill>
+                <a:latin typeface="+mn-lt"/>
+                <a:ea typeface="+mn-ea"/>
+                <a:cs typeface="+mn-cs"/>
+              </a:rPr>
+              <a:t>T*</a:t>
+            </a:r>
+            <a:r>
+              <a:rPr lang="ru-RU" dirty="0"/>
+              <a:t>, то выражение </a:t>
+            </a:r>
+            <a:r>
+              <a:rPr lang="ru-RU" sz="1200" kern="1200" dirty="0">
+                <a:solidFill>
+                  <a:schemeClr val="tx1"/>
+                </a:solidFill>
+                <a:latin typeface="+mn-lt"/>
+                <a:ea typeface="+mn-ea"/>
+                <a:cs typeface="+mn-cs"/>
+              </a:rPr>
+              <a:t>p + n</a:t>
+            </a:r>
+            <a:r>
+              <a:rPr lang="ru-RU" dirty="0"/>
+              <a:t> означает переход на </a:t>
+            </a:r>
+            <a:r>
+              <a:rPr lang="ru-RU" sz="1200" kern="1200" dirty="0">
+                <a:solidFill>
+                  <a:schemeClr val="tx1"/>
+                </a:solidFill>
+                <a:latin typeface="+mn-lt"/>
+                <a:ea typeface="+mn-ea"/>
+                <a:cs typeface="+mn-cs"/>
+              </a:rPr>
+              <a:t>n</a:t>
+            </a:r>
+            <a:r>
+              <a:rPr lang="ru-RU" dirty="0"/>
+              <a:t> элементов вперёд относительно текущего адреса. Адрес при этом увеличивается на </a:t>
+            </a:r>
+            <a:r>
+              <a:rPr lang="ru-RU" sz="1200" kern="1200" dirty="0">
+                <a:solidFill>
+                  <a:schemeClr val="tx1"/>
+                </a:solidFill>
+                <a:latin typeface="+mn-lt"/>
+                <a:ea typeface="+mn-ea"/>
+                <a:cs typeface="+mn-cs"/>
+              </a:rPr>
+              <a:t>n * </a:t>
+            </a:r>
+            <a:r>
+              <a:rPr lang="ru-RU" sz="1200" kern="1200" dirty="0" err="1">
+                <a:solidFill>
+                  <a:schemeClr val="tx1"/>
+                </a:solidFill>
+                <a:latin typeface="+mn-lt"/>
+                <a:ea typeface="+mn-ea"/>
+                <a:cs typeface="+mn-cs"/>
+              </a:rPr>
+              <a:t>sizeof</a:t>
+            </a:r>
+            <a:r>
+              <a:rPr lang="ru-RU" sz="1200" kern="1200" dirty="0">
+                <a:solidFill>
+                  <a:schemeClr val="tx1"/>
+                </a:solidFill>
+                <a:latin typeface="+mn-lt"/>
+                <a:ea typeface="+mn-ea"/>
+                <a:cs typeface="+mn-cs"/>
+              </a:rPr>
+              <a:t>(T)</a:t>
+            </a:r>
+            <a:r>
+              <a:rPr lang="ru-RU" dirty="0"/>
+              <a:t> байт.</a:t>
+            </a:r>
+          </a:p>
+          <a:p>
+            <a:r>
+              <a:rPr lang="ru-RU" dirty="0"/>
+              <a:t>В примере объявляется массив из пяти целых чисел. Переменная </a:t>
+            </a:r>
+            <a:r>
+              <a:rPr lang="ru-RU" sz="1200" kern="1200" dirty="0">
+                <a:solidFill>
+                  <a:schemeClr val="tx1"/>
+                </a:solidFill>
+                <a:latin typeface="+mn-lt"/>
+                <a:ea typeface="+mn-ea"/>
+                <a:cs typeface="+mn-cs"/>
+              </a:rPr>
+              <a:t>p</a:t>
+            </a:r>
+            <a:r>
+              <a:rPr lang="ru-RU" dirty="0"/>
+              <a:t> получает адрес первого элемента массива.</a:t>
+            </a:r>
+          </a:p>
+          <a:p>
+            <a:r>
+              <a:rPr lang="ru-RU" dirty="0"/>
+              <a:t>Затем мы выводим три значения: сам указатель </a:t>
+            </a:r>
+            <a:r>
+              <a:rPr lang="ru-RU" sz="1200" kern="1200" dirty="0">
+                <a:solidFill>
+                  <a:schemeClr val="tx1"/>
+                </a:solidFill>
+                <a:latin typeface="+mn-lt"/>
+                <a:ea typeface="+mn-ea"/>
+                <a:cs typeface="+mn-cs"/>
+              </a:rPr>
+              <a:t>p</a:t>
+            </a:r>
+            <a:r>
+              <a:rPr lang="ru-RU" dirty="0"/>
+              <a:t>, указатель </a:t>
+            </a:r>
+            <a:r>
+              <a:rPr lang="ru-RU" sz="1200" kern="1200" dirty="0">
+                <a:solidFill>
+                  <a:schemeClr val="tx1"/>
+                </a:solidFill>
+                <a:latin typeface="+mn-lt"/>
+                <a:ea typeface="+mn-ea"/>
+                <a:cs typeface="+mn-cs"/>
+              </a:rPr>
+              <a:t>p + 2</a:t>
+            </a:r>
+            <a:r>
+              <a:rPr lang="ru-RU" dirty="0"/>
+              <a:t>, и значение по этому адресу — </a:t>
+            </a:r>
+            <a:r>
+              <a:rPr lang="ru-RU" sz="1200" kern="1200" dirty="0">
+                <a:solidFill>
+                  <a:schemeClr val="tx1"/>
+                </a:solidFill>
+                <a:latin typeface="+mn-lt"/>
+                <a:ea typeface="+mn-ea"/>
+                <a:cs typeface="+mn-cs"/>
+              </a:rPr>
+              <a:t>*(p + 2)</a:t>
+            </a:r>
+            <a:r>
+              <a:rPr lang="ru-RU" dirty="0"/>
+              <a:t>.</a:t>
+            </a:r>
+          </a:p>
+          <a:p>
+            <a:r>
+              <a:rPr lang="ru-RU" dirty="0"/>
+              <a:t>Мы видим, что </a:t>
+            </a:r>
+            <a:r>
+              <a:rPr lang="ru-RU" sz="1200" kern="1200" dirty="0">
+                <a:solidFill>
+                  <a:schemeClr val="tx1"/>
+                </a:solidFill>
+                <a:latin typeface="+mn-lt"/>
+                <a:ea typeface="+mn-ea"/>
+                <a:cs typeface="+mn-cs"/>
+              </a:rPr>
+              <a:t>p + 2</a:t>
+            </a:r>
+            <a:r>
+              <a:rPr lang="ru-RU" dirty="0"/>
+              <a:t> указывает на третий элемент массива, а выражение </a:t>
+            </a:r>
+            <a:r>
+              <a:rPr lang="ru-RU" sz="1200" kern="1200" dirty="0">
+                <a:solidFill>
+                  <a:schemeClr val="tx1"/>
+                </a:solidFill>
+                <a:latin typeface="+mn-lt"/>
+                <a:ea typeface="+mn-ea"/>
+                <a:cs typeface="+mn-cs"/>
+              </a:rPr>
+              <a:t>*(p + 2)</a:t>
+            </a:r>
+            <a:r>
+              <a:rPr lang="ru-RU" dirty="0"/>
+              <a:t> возвращает значение этого элемента.</a:t>
+            </a:r>
+          </a:p>
+          <a:p>
+            <a:endParaRPr lang="en-US" dirty="0"/>
           </a:p>
         </p:txBody>
       </p:sp>
@@ -7033,7 +7459,128 @@
           <a:bodyPr/>
           <a:lstStyle/>
           <a:p>
-            <a:endParaRPr lang="en-US"/>
+            <a:r>
+              <a:rPr lang="ru-RU" dirty="0"/>
+              <a:t>Помимо сложения, для указателей определена и операция вычитания.</a:t>
+            </a:r>
+          </a:p>
+          <a:p>
+            <a:r>
+              <a:rPr lang="ru-RU" dirty="0"/>
+              <a:t>Если указатель имеет тип </a:t>
+            </a:r>
+            <a:r>
+              <a:rPr lang="ru-RU" sz="1200" kern="1200" dirty="0">
+                <a:solidFill>
+                  <a:schemeClr val="tx1"/>
+                </a:solidFill>
+                <a:latin typeface="+mn-lt"/>
+                <a:ea typeface="+mn-ea"/>
+                <a:cs typeface="+mn-cs"/>
+              </a:rPr>
+              <a:t>T*</a:t>
+            </a:r>
+            <a:r>
+              <a:rPr lang="ru-RU" dirty="0"/>
+              <a:t>, то выражение </a:t>
+            </a:r>
+            <a:r>
+              <a:rPr lang="ru-RU" sz="1200" kern="1200" dirty="0">
+                <a:solidFill>
+                  <a:schemeClr val="tx1"/>
+                </a:solidFill>
+                <a:latin typeface="+mn-lt"/>
+                <a:ea typeface="+mn-ea"/>
+                <a:cs typeface="+mn-cs"/>
+              </a:rPr>
+              <a:t>p - n</a:t>
+            </a:r>
+            <a:r>
+              <a:rPr lang="ru-RU" dirty="0"/>
+              <a:t> перемещает указатель на </a:t>
+            </a:r>
+            <a:r>
+              <a:rPr lang="ru-RU" sz="1200" kern="1200" dirty="0">
+                <a:solidFill>
+                  <a:schemeClr val="tx1"/>
+                </a:solidFill>
+                <a:latin typeface="+mn-lt"/>
+                <a:ea typeface="+mn-ea"/>
+                <a:cs typeface="+mn-cs"/>
+              </a:rPr>
+              <a:t>n</a:t>
+            </a:r>
+            <a:r>
+              <a:rPr lang="ru-RU" dirty="0"/>
+              <a:t> элементов назад. Фактически адрес уменьшается на </a:t>
+            </a:r>
+            <a:r>
+              <a:rPr lang="ru-RU" sz="1200" kern="1200" dirty="0">
+                <a:solidFill>
+                  <a:schemeClr val="tx1"/>
+                </a:solidFill>
+                <a:latin typeface="+mn-lt"/>
+                <a:ea typeface="+mn-ea"/>
+                <a:cs typeface="+mn-cs"/>
+              </a:rPr>
+              <a:t>n * </a:t>
+            </a:r>
+            <a:r>
+              <a:rPr lang="ru-RU" sz="1200" kern="1200" dirty="0" err="1">
+                <a:solidFill>
+                  <a:schemeClr val="tx1"/>
+                </a:solidFill>
+                <a:latin typeface="+mn-lt"/>
+                <a:ea typeface="+mn-ea"/>
+                <a:cs typeface="+mn-cs"/>
+              </a:rPr>
+              <a:t>sizeof</a:t>
+            </a:r>
+            <a:r>
+              <a:rPr lang="ru-RU" sz="1200" kern="1200" dirty="0">
+                <a:solidFill>
+                  <a:schemeClr val="tx1"/>
+                </a:solidFill>
+                <a:latin typeface="+mn-lt"/>
+                <a:ea typeface="+mn-ea"/>
+                <a:cs typeface="+mn-cs"/>
+              </a:rPr>
+              <a:t>(T)</a:t>
+            </a:r>
+            <a:r>
+              <a:rPr lang="ru-RU" dirty="0"/>
+              <a:t> байт.</a:t>
+            </a:r>
+          </a:p>
+          <a:p>
+            <a:r>
+              <a:rPr lang="ru-RU" dirty="0"/>
+              <a:t>Также можно вычитать два указателя. Но стандарт разрешает это только в том случае, если оба указателя указывают на элементы одного и того же массива.</a:t>
+            </a:r>
+          </a:p>
+          <a:p>
+            <a:r>
+              <a:rPr lang="ru-RU" dirty="0"/>
+              <a:t>Результатом является значение типа </a:t>
+            </a:r>
+            <a:r>
+              <a:rPr lang="ru-RU" sz="1200" kern="1200" dirty="0" err="1">
+                <a:solidFill>
+                  <a:schemeClr val="tx1"/>
+                </a:solidFill>
+                <a:latin typeface="+mn-lt"/>
+                <a:ea typeface="+mn-ea"/>
+                <a:cs typeface="+mn-cs"/>
+              </a:rPr>
+              <a:t>ptrdiff_t</a:t>
+            </a:r>
+            <a:r>
+              <a:rPr lang="ru-RU" dirty="0"/>
+              <a:t>. Оно показывает, сколько элементов находится между этими указателями. Это значение может быть положительным, отрицательным или равным нулю.</a:t>
+            </a:r>
+          </a:p>
+          <a:p>
+            <a:endParaRPr lang="en-US" dirty="0"/>
           </a:p>
         </p:txBody>
       </p:sp>
@@ -24703,6 +25250,11 @@
               <a:rPr lang="en-US" dirty="0"/>
               <a:t>Type punning</a:t>
             </a:r>
+            <a:r>
+              <a:rPr lang="ru-RU" dirty="0"/>
+              <a:t> (Каламбур типов)</a:t>
+            </a:r>
+            <a:endParaRPr lang="en-US" dirty="0"/>
           </a:p>
         </p:txBody>
       </p:sp>
@@ -25409,6 +25961,7 @@
             </a:r>
           </a:p>
           <a:p>
+            <a:pPr lvl="1"/>
             <a:r>
               <a:rPr lang="ru-RU" dirty="0"/>
               <a:t>читать то поле, которое </a:t>

--- a/lectures/06/Pointer Arithmetic, Memory Interpretation.pptx
+++ b/lectures/06/Pointer Arithmetic, Memory Interpretation.pptx
@@ -244,7 +244,7 @@
           <a:p>
             <a:fld id="{FC8191BF-0D8E-4934-B475-DAAF261CE755}" type="datetimeFigureOut">
               <a:rPr lang="en-US" smtClean="0"/>
-              <a:t>3/14/2026</a:t>
+              <a:t>5/31/2026</a:t>
             </a:fld>
             <a:endParaRPr lang="en-US"/>
           </a:p>
@@ -7851,7 +7851,7 @@
           <a:p>
             <a:fld id="{F6603947-1FD3-4FBB-8DBD-AC1F3B98016D}" type="datetime1">
               <a:rPr lang="en-US" smtClean="0"/>
-              <a:t>3/14/2026</a:t>
+              <a:t>5/31/2026</a:t>
             </a:fld>
             <a:endParaRPr lang="en-US"/>
           </a:p>
@@ -8049,7 +8049,7 @@
           <a:p>
             <a:fld id="{37169F62-763B-4A99-AB30-0A2206259F50}" type="datetime1">
               <a:rPr lang="en-US" smtClean="0"/>
-              <a:t>3/14/2026</a:t>
+              <a:t>5/31/2026</a:t>
             </a:fld>
             <a:endParaRPr lang="en-US"/>
           </a:p>
@@ -8257,7 +8257,7 @@
           <a:p>
             <a:fld id="{B6267058-657D-48F8-93A2-A5C0CCA414BF}" type="datetime1">
               <a:rPr lang="en-US" smtClean="0"/>
-              <a:t>3/14/2026</a:t>
+              <a:t>5/31/2026</a:t>
             </a:fld>
             <a:endParaRPr lang="en-US"/>
           </a:p>
@@ -8455,7 +8455,7 @@
           <a:p>
             <a:fld id="{51DDDDBC-2BA9-479F-8034-4E4402EA6DD4}" type="datetime1">
               <a:rPr lang="en-US" smtClean="0"/>
-              <a:t>3/14/2026</a:t>
+              <a:t>5/31/2026</a:t>
             </a:fld>
             <a:endParaRPr lang="en-US"/>
           </a:p>
@@ -8730,7 +8730,7 @@
           <a:p>
             <a:fld id="{38853C79-16C1-49B6-9E37-C361712BF917}" type="datetime1">
               <a:rPr lang="en-US" smtClean="0"/>
-              <a:t>3/14/2026</a:t>
+              <a:t>5/31/2026</a:t>
             </a:fld>
             <a:endParaRPr lang="en-US"/>
           </a:p>
@@ -8995,7 +8995,7 @@
           <a:p>
             <a:fld id="{7ACED8DD-8639-4355-94D6-978B1AB2916B}" type="datetime1">
               <a:rPr lang="en-US" smtClean="0"/>
-              <a:t>3/14/2026</a:t>
+              <a:t>5/31/2026</a:t>
             </a:fld>
             <a:endParaRPr lang="en-US"/>
           </a:p>
@@ -9407,7 +9407,7 @@
           <a:p>
             <a:fld id="{2E0CCF10-3D00-434A-9C53-B6A88D490794}" type="datetime1">
               <a:rPr lang="en-US" smtClean="0"/>
-              <a:t>3/14/2026</a:t>
+              <a:t>5/31/2026</a:t>
             </a:fld>
             <a:endParaRPr lang="en-US"/>
           </a:p>
@@ -9548,7 +9548,7 @@
           <a:p>
             <a:fld id="{C0875BDB-792F-4711-A053-B8E33EA0FFF7}" type="datetime1">
               <a:rPr lang="en-US" smtClean="0"/>
-              <a:t>3/14/2026</a:t>
+              <a:t>5/31/2026</a:t>
             </a:fld>
             <a:endParaRPr lang="en-US"/>
           </a:p>
@@ -9661,7 +9661,7 @@
           <a:p>
             <a:fld id="{EB212012-3FCB-4A74-BCD7-F52481CF64A2}" type="datetime1">
               <a:rPr lang="en-US" smtClean="0"/>
-              <a:t>3/14/2026</a:t>
+              <a:t>5/31/2026</a:t>
             </a:fld>
             <a:endParaRPr lang="en-US"/>
           </a:p>
@@ -9972,7 +9972,7 @@
           <a:p>
             <a:fld id="{45B501C5-61C8-4C11-9A8B-4B42F81B5C41}" type="datetime1">
               <a:rPr lang="en-US" smtClean="0"/>
-              <a:t>3/14/2026</a:t>
+              <a:t>5/31/2026</a:t>
             </a:fld>
             <a:endParaRPr lang="en-US"/>
           </a:p>
@@ -10260,7 +10260,7 @@
           <a:p>
             <a:fld id="{0FDA3E8C-9E58-4BC8-97BF-BC382C92B23D}" type="datetime1">
               <a:rPr lang="en-US" smtClean="0"/>
-              <a:t>3/14/2026</a:t>
+              <a:t>5/31/2026</a:t>
             </a:fld>
             <a:endParaRPr lang="en-US"/>
           </a:p>
@@ -10501,7 +10501,7 @@
           <a:p>
             <a:fld id="{B850932F-3B50-4B7E-88A4-A447FCCDC6F7}" type="datetime1">
               <a:rPr lang="en-US" smtClean="0"/>
-              <a:t>3/14/2026</a:t>
+              <a:t>5/31/2026</a:t>
             </a:fld>
             <a:endParaRPr lang="en-US"/>
           </a:p>
